--- a/output/Material_Executivo_State_of_Data_Fase3.pptx
+++ b/output/Material_Executivo_State_of_Data_Fase3.pptx
@@ -7602,7 +7602,7 @@
         <p:spPr>
           <a:xfrm>
             <a:off x="457200" y="1371600"/>
-            <a:ext cx="6949440" cy="3779631"/>
+            <a:ext cx="6949440" cy="3904548"/>
           </a:xfrm>
           <a:prstGeom prst="rect">
             <a:avLst/>
@@ -7890,7 +7890,7 @@
                 </a:solidFill>
                 <a:latin typeface="Calibri"/>
               </a:rPr>
-              <a:t>Salário estimado pelo ponto médio das faixas declaradas; a faixa superior é aberta, então os valores servem para comparar recortes, não como remuneração absoluta. Recortes com menos de 30 respondentes foram omitidos. Especialista/Staff+ existe apenas na edição 2025-2026.</a:t>
+              <a:t>Valores nominais, não corrigidos pela inflação. Salário estimado pelo ponto médio das faixas; a faixa superior é aberta, então os valores servem para comparar recortes, não como remuneração absoluta. Recortes com menos de 30 respondentes foram omitidos. Especialista/Staff+ existe apenas em 2025-2026.</a:t>
             </a:r>
           </a:p>
         </p:txBody>
